--- a/curso/pptx/S04.pptx
+++ b/curso/pptx/S04.pptx
@@ -4130,7 +4130,7 @@
                 </a:solidFill>
                 <a:latin typeface="Nunito Sans"/>
               </a:rPr>
-              <a:t>迪伦（Dylan）说：“音乐老师要离开学校了。”</a:t>
+              <a:t>一个男孩说：“音乐老师要离开学校了。”</a:t>
             </a:r>
           </a:p>
         </p:txBody>
@@ -4178,7 +4178,7 @@
                 </a:solidFill>
                 <a:latin typeface="Nunito Sans"/>
               </a:rPr>
-              <a:t>封闭式问题：“是真的吗？”迪伦：“是。”我什么新东西也没有了解到。</a:t>
+              <a:t>封闭式问题：“是真的吗？”他：“是。”我什么新东西也没有了解到。</a:t>
             </a:r>
           </a:p>
           <a:p>
@@ -4203,7 +4203,7 @@
                 </a:solidFill>
                 <a:latin typeface="Nunito Sans"/>
               </a:rPr>
-              <a:t>开放式问题：“你怎么知道的？”迪伦：“是一个四年级的学生告诉我的。”</a:t>
+              <a:t>开放式问题：“你怎么知道的？”他：“是一个四年级的学生告诉我的。”</a:t>
             </a:r>
           </a:p>
           <a:p>
@@ -4228,7 +4228,7 @@
                 </a:solidFill>
                 <a:latin typeface="Nunito Sans"/>
               </a:rPr>
-              <a:t>再问一个：“那他是怎么知道的？”迪伦：“不知道。”</a:t>
+              <a:t>再问一个：“那他是怎么知道的？”他：“不知道。”</a:t>
             </a:r>
           </a:p>
           <a:p>
@@ -7311,7 +7311,7 @@
                 </a:solidFill>
                 <a:latin typeface="Nunito Sans"/>
               </a:rPr>
-              <a:t>莱雷（Leire）春游回来了。妈妈问她：“好玩吗？”莱雷：“好玩。”爸爸问她：“你最喜欢什么？”</a:t>
+              <a:t>一个女孩春游回来了。妈妈问她：“好玩吗？”她答：“好玩。”爸爸问她：“你最喜欢什么？”</a:t>
             </a:r>
           </a:p>
         </p:txBody>
